--- a/산출물/통합반/이론_오프라인/03회차/통합반_오프라인_03회차.pptx
+++ b/산출물/통합반/이론_오프라인/03회차/통합반_오프라인_03회차.pptx
@@ -752,7 +752,7 @@
           </a:p>
           <a:p>
             <a:r>
-              <a:t>[다음] 범위와 복수 조건: AND · OR</a:t>
+              <a:t>[다음] 범위와 복수 조건</a:t>
             </a:r>
           </a:p>
         </p:txBody>
@@ -1247,7 +1247,7 @@
           </a:p>
           <a:p>
             <a:r>
-              <a:t>[다음] 판정의 근거: 지식 출처와 결과 기록</a:t>
+              <a:t>[다음] 판정의 근거</a:t>
             </a:r>
           </a:p>
         </p:txBody>
@@ -8079,7 +8079,7 @@
       </p:sp>
       <p:pic>
         <p:nvPicPr>
-          <p:cNvPr id="6" name="삽화:수직선_경계.svg" descr="illust_5673360950473229468_1793113376.png"/>
+          <p:cNvPr id="6" name="삽화:수직선_경계.svg" descr="illust_5770610218098220306_1793113376.png"/>
           <p:cNvPicPr>
             <a:picLocks noChangeAspect="1"/>
           </p:cNvPicPr>
@@ -18701,7 +18701,7 @@
       </p:sp>
       <p:pic>
         <p:nvPicPr>
-          <p:cNvPr id="6" name="삽화:성과경로_6.svg" descr="illust_1958330016376099855_1793113376.png"/>
+          <p:cNvPr id="6" name="삽화:성과경로_6.svg" descr="illust_4340380513422570928_1793113376.png"/>
           <p:cNvPicPr>
             <a:picLocks noChangeAspect="1"/>
           </p:cNvPicPr>
@@ -21637,7 +21637,7 @@
       </p:sp>
       <p:pic>
         <p:nvPicPr>
-          <p:cNvPr id="6" name="삽화:가정분석_3.svg" descr="illust_2149427035420242871_1793113376.png"/>
+          <p:cNvPr id="6" name="삽화:가정분석_3.svg" descr="illust_3094398400278421471_1793113376.png"/>
           <p:cNvPicPr>
             <a:picLocks noChangeAspect="1"/>
           </p:cNvPicPr>
@@ -24937,7 +24937,7 @@
       </p:sp>
       <p:pic>
         <p:nvPicPr>
-          <p:cNvPr id="6" name="삽화:운전모드_후보.svg" descr="illust_8059458795844910393_1793113376.png"/>
+          <p:cNvPr id="6" name="삽화:운전모드_후보.svg" descr="illust_7839865817428247748_1793113376.png"/>
           <p:cNvPicPr>
             <a:picLocks noChangeAspect="1"/>
           </p:cNvPicPr>

--- a/산출물/통합반/이론_오프라인/03회차/통합반_오프라인_03회차.pptx
+++ b/산출물/통합반/이론_오프라인/03회차/통합반_오프라인_03회차.pptx
@@ -547,11 +547,6 @@
           </a:p>
           <a:p>
             <a:r>
-              <a:t>· 이론은 온라인 교재의 DMN · 성과 비교 장에서 오늘 실습에 쓰는 것만</a:t>
-            </a:r>
-          </a:p>
-          <a:p>
-            <a:r>
               <a:t>[다음] 학습목표</a:t>
             </a:r>
           </a:p>
@@ -747,7 +742,7 @@
           </a:p>
           <a:p>
             <a:r>
-              <a:t>· 임계값 = 판정이 갈리는 기준. 기준에서 먼 값은 등호가 있든 없든 결과가 같아 부호가 틀려도 모르고 지나간다 → 바로 아래 · 같은 값 · 바로 위를 시험(실습의 경계값 입력도 이 때문)</a:t>
+              <a:t>· 임계값 = 판정이 갈리는 기준. 기준에서 먼 값은 등호가 있든 없든 결과가 같아 부호가 틀려도 모르고 지나간다 → 바로 아래 · 같은 값 · 바로 위를 시험</a:t>
             </a:r>
           </a:p>
           <a:p>
@@ -1622,7 +1617,7 @@
           </a:p>
           <a:p>
             <a:r>
-              <a:t>· 2 조건과 출력: 「넘으면」과 「이상이면」은 기준값에서 갈린다 → 실습에서 경계값을 넣어 시험</a:t>
+              <a:t>· 2 조건과 출력: 「넘으면」과 「이상이면」은 기준값에서 갈린다</a:t>
             </a:r>
           </a:p>
           <a:p>
@@ -1827,7 +1822,7 @@
           </a:p>
           <a:p>
             <a:r>
-              <a:t>· 납기 지연 위약금: 계약의 시간당 위약금 × 실제로 납기를 넘긴 시간. 느려졌다는 사실만으로 위약금이 생기지 않는다. 이 위약금(오더 계약, 시간당) ≠ 앞 그림의 지체상금(월 단위 성과 지표)</a:t>
+              <a:t>· 납기 지연 위약금: 계약의 시간당 위약금 × 실제로 납기를 넘긴 시간. 느려졌다는 사실만으로 위약금이 생기지 않는다. 이 위약금(오더 계약, 시간당) ≠ 앞 그림의 납기 준수율(성과 지표)</a:t>
             </a:r>
           </a:p>
           <a:p>
@@ -2052,7 +2047,7 @@
           </a:p>
           <a:p>
             <a:r>
-              <a:t>· 한 번에 여러 값을 바꾸면 까닭을 가리기 어렵다 → 하나씩 바꾸고, 함께 바꿀 땐 무엇을 유지 · 변경했는지 기록. KPI 목표를 바꾸면 달성 판정은 달라져도 이미 측정한 실제 온도는 그대로</a:t>
+              <a:t>· 한 번에 여러 값을 바꾸면 까닭을 가리기 어렵다 → 하나씩 바꾸고, 함께 바꿀 땐 무엇을 유지 · 변경했는지 기록. 성과 지표의 목표값을 바꾸면 달성 판정은 달라져도 이미 측정한 실제 온도는 그대로</a:t>
             </a:r>
           </a:p>
           <a:p>
@@ -2902,11 +2897,6 @@
           </a:p>
           <a:p>
             <a:r>
-              <a:t>· 회차 정리: 조치의 절차와 수행 조건 확인 → 가능한 후보의 득실 비교. 판단을 설명하려면 절차 · 규칙 · 지표마다 근거가 필요</a:t>
-            </a:r>
-          </a:p>
-          <a:p>
-            <a:r>
               <a:t>· 이어지는 실습: 포털 What-if에서 운전 조건을 바꿔 허용 · 제외와 순위 변화를 보고, 제공 SOP에서 입력 · 단위 · 경계 · 출처를 뽑아 결정표를 만든다. 그 결정표로 허용 · 제외와 사유를 내는 판정 기능을 만들어 정상 · 경계값 · 여러 규칙 · 금지 조건을 조건표와 대조한다</a:t>
             </a:r>
           </a:p>
@@ -3502,7 +3492,7 @@
           </a:p>
           <a:p>
             <a:r>
-              <a:t>· 실습의 조건표 작성과 경계값 시험이 이 단원을 그대로 쓴다</a:t>
+              <a:t>· 조건의 세 부분과 연산자 → 경계의 포함 여부 → AND · OR 묶음 → 규칙이 내는 출력 차례로</a:t>
             </a:r>
           </a:p>
           <a:p>
@@ -8549,7 +8539,7 @@
       </p:sp>
       <p:pic>
         <p:nvPicPr>
-          <p:cNvPr id="6" name="삽화:수직선_경계.svg" descr="illust_5415177074991103210_1793113376.png"/>
+          <p:cNvPr id="6" name="삽화:수직선_경계.svg" descr="illust_2521092353574500616_1793113376.png"/>
           <p:cNvPicPr>
             <a:picLocks noChangeAspect="1"/>
           </p:cNvPicPr>
@@ -18154,7 +18144,7 @@
       </p:sp>
       <p:pic>
         <p:nvPicPr>
-          <p:cNvPr id="6" name="삽화:성과경로_6.svg" descr="illust_1314779435345473676_1793113376.png"/>
+          <p:cNvPr id="6" name="삽화:성과경로_6.svg" descr="illust_7658143600817636496_1793113376.png"/>
           <p:cNvPicPr>
             <a:picLocks noChangeAspect="1"/>
           </p:cNvPicPr>
@@ -21090,7 +21080,7 @@
       </p:sp>
       <p:pic>
         <p:nvPicPr>
-          <p:cNvPr id="6" name="삽화:가정분석_3.svg" descr="illust_1642359368603106929_1793113376.png"/>
+          <p:cNvPr id="6" name="삽화:가정분석_3.svg" descr="illust_134456005505135319_1793113376.png"/>
           <p:cNvPicPr>
             <a:picLocks noChangeAspect="1"/>
           </p:cNvPicPr>
@@ -28832,7 +28822,7 @@
       </p:sp>
       <p:pic>
         <p:nvPicPr>
-          <p:cNvPr id="6" name="삽화:운전모드_후보.svg" descr="illust_275452491184441320_1793113376.png"/>
+          <p:cNvPr id="6" name="삽화:운전모드_후보.svg" descr="illust_7389312918247533978_1793113376.png"/>
           <p:cNvPicPr>
             <a:picLocks noChangeAspect="1"/>
           </p:cNvPicPr>
